--- a/docs/Project_Presentation.pptx
+++ b/docs/Project_Presentation.pptx
@@ -9013,7 +9013,7 @@
         <p:spPr>
           <a:xfrm>
             <a:off x="6596743" y="4133963"/>
-            <a:ext cx="4528457" cy="1200329"/>
+            <a:ext cx="4846320" cy="1200329"/>
           </a:xfrm>
           <a:prstGeom prst="rect">
             <a:avLst/>
